--- a/ssh-keys/figures/context-v01.pptx
+++ b/ssh-keys/figures/context-v01.pptx
@@ -104,6 +104,11 @@
       </a:defRPr>
     </a:lvl9pPr>
   </p:defaultTextStyle>
+  <p:extLst>
+    <p:ext uri="{EFAFB233-063F-42B5-8137-9DF3F51BA10A}">
+      <p15:sldGuideLst xmlns:p15="http://schemas.microsoft.com/office/powerpoint/2012/main"/>
+    </p:ext>
+  </p:extLst>
 </p:presentation>
 </file>
 
@@ -254,7 +259,7 @@
           <a:p>
             <a:fld id="{9B14B292-788E-2748-9CD0-5BCF704EBB71}" type="datetimeFigureOut">
               <a:rPr lang="en-US" smtClean="0"/>
-              <a:t>6/4/26</a:t>
+              <a:t>7/7/26</a:t>
             </a:fld>
             <a:endParaRPr lang="en-US"/>
           </a:p>
@@ -452,7 +457,7 @@
           <a:p>
             <a:fld id="{9B14B292-788E-2748-9CD0-5BCF704EBB71}" type="datetimeFigureOut">
               <a:rPr lang="en-US" smtClean="0"/>
-              <a:t>6/4/26</a:t>
+              <a:t>7/7/26</a:t>
             </a:fld>
             <a:endParaRPr lang="en-US"/>
           </a:p>
@@ -660,7 +665,7 @@
           <a:p>
             <a:fld id="{9B14B292-788E-2748-9CD0-5BCF704EBB71}" type="datetimeFigureOut">
               <a:rPr lang="en-US" smtClean="0"/>
-              <a:t>6/4/26</a:t>
+              <a:t>7/7/26</a:t>
             </a:fld>
             <a:endParaRPr lang="en-US"/>
           </a:p>
@@ -858,7 +863,7 @@
           <a:p>
             <a:fld id="{9B14B292-788E-2748-9CD0-5BCF704EBB71}" type="datetimeFigureOut">
               <a:rPr lang="en-US" smtClean="0"/>
-              <a:t>6/4/26</a:t>
+              <a:t>7/7/26</a:t>
             </a:fld>
             <a:endParaRPr lang="en-US"/>
           </a:p>
@@ -1133,7 +1138,7 @@
           <a:p>
             <a:fld id="{9B14B292-788E-2748-9CD0-5BCF704EBB71}" type="datetimeFigureOut">
               <a:rPr lang="en-US" smtClean="0"/>
-              <a:t>6/4/26</a:t>
+              <a:t>7/7/26</a:t>
             </a:fld>
             <a:endParaRPr lang="en-US"/>
           </a:p>
@@ -1398,7 +1403,7 @@
           <a:p>
             <a:fld id="{9B14B292-788E-2748-9CD0-5BCF704EBB71}" type="datetimeFigureOut">
               <a:rPr lang="en-US" smtClean="0"/>
-              <a:t>6/4/26</a:t>
+              <a:t>7/7/26</a:t>
             </a:fld>
             <a:endParaRPr lang="en-US"/>
           </a:p>
@@ -1810,7 +1815,7 @@
           <a:p>
             <a:fld id="{9B14B292-788E-2748-9CD0-5BCF704EBB71}" type="datetimeFigureOut">
               <a:rPr lang="en-US" smtClean="0"/>
-              <a:t>6/4/26</a:t>
+              <a:t>7/7/26</a:t>
             </a:fld>
             <a:endParaRPr lang="en-US"/>
           </a:p>
@@ -1951,7 +1956,7 @@
           <a:p>
             <a:fld id="{9B14B292-788E-2748-9CD0-5BCF704EBB71}" type="datetimeFigureOut">
               <a:rPr lang="en-US" smtClean="0"/>
-              <a:t>6/4/26</a:t>
+              <a:t>7/7/26</a:t>
             </a:fld>
             <a:endParaRPr lang="en-US"/>
           </a:p>
@@ -2064,7 +2069,7 @@
           <a:p>
             <a:fld id="{9B14B292-788E-2748-9CD0-5BCF704EBB71}" type="datetimeFigureOut">
               <a:rPr lang="en-US" smtClean="0"/>
-              <a:t>6/4/26</a:t>
+              <a:t>7/7/26</a:t>
             </a:fld>
             <a:endParaRPr lang="en-US"/>
           </a:p>
@@ -2375,7 +2380,7 @@
           <a:p>
             <a:fld id="{9B14B292-788E-2748-9CD0-5BCF704EBB71}" type="datetimeFigureOut">
               <a:rPr lang="en-US" smtClean="0"/>
-              <a:t>6/4/26</a:t>
+              <a:t>7/7/26</a:t>
             </a:fld>
             <a:endParaRPr lang="en-US"/>
           </a:p>
@@ -2663,7 +2668,7 @@
           <a:p>
             <a:fld id="{9B14B292-788E-2748-9CD0-5BCF704EBB71}" type="datetimeFigureOut">
               <a:rPr lang="en-US" smtClean="0"/>
-              <a:t>6/4/26</a:t>
+              <a:t>7/7/26</a:t>
             </a:fld>
             <a:endParaRPr lang="en-US"/>
           </a:p>
@@ -2904,7 +2909,7 @@
           <a:p>
             <a:fld id="{9B14B292-788E-2748-9CD0-5BCF704EBB71}" type="datetimeFigureOut">
               <a:rPr lang="en-US" smtClean="0"/>
-              <a:t>6/4/26</a:t>
+              <a:t>7/7/26</a:t>
             </a:fld>
             <a:endParaRPr lang="en-US"/>
           </a:p>
@@ -3498,7 +3503,7 @@
         <p:spPr>
           <a:xfrm>
             <a:off x="6668767" y="1763486"/>
-            <a:ext cx="4510861" cy="2438400"/>
+            <a:ext cx="4510861" cy="3194104"/>
           </a:xfrm>
           <a:prstGeom prst="rect">
             <a:avLst/>
@@ -4529,6 +4534,76 @@
                 </a:solidFill>
               </a:rPr>
               <a:t>ssh connection</a:t>
+            </a:r>
+          </a:p>
+        </p:txBody>
+      </p:sp>
+      <p:sp>
+        <p:nvSpPr>
+          <p:cNvPr id="12" name="Rectangle 11">
+            <a:extLst>
+              <a:ext uri="{FF2B5EF4-FFF2-40B4-BE49-F238E27FC236}">
+                <a16:creationId xmlns:a16="http://schemas.microsoft.com/office/drawing/2014/main" id="{6903AC19-B7EB-3EF3-2C7A-EA1026527411}"/>
+              </a:ext>
+            </a:extLst>
+          </p:cNvPr>
+          <p:cNvSpPr/>
+          <p:nvPr/>
+        </p:nvSpPr>
+        <p:spPr>
+          <a:xfrm>
+            <a:off x="6924299" y="3924190"/>
+            <a:ext cx="2223988" cy="884836"/>
+          </a:xfrm>
+          <a:prstGeom prst="rect">
+            <a:avLst/>
+          </a:prstGeom>
+          <a:noFill/>
+          <a:ln w="28575">
+            <a:solidFill>
+              <a:schemeClr val="tx1"/>
+            </a:solidFill>
+          </a:ln>
+        </p:spPr>
+        <p:style>
+          <a:lnRef idx="2">
+            <a:schemeClr val="accent1">
+              <a:shade val="15000"/>
+            </a:schemeClr>
+          </a:lnRef>
+          <a:fillRef idx="1">
+            <a:schemeClr val="accent1"/>
+          </a:fillRef>
+          <a:effectRef idx="0">
+            <a:schemeClr val="accent1"/>
+          </a:effectRef>
+          <a:fontRef idx="minor">
+            <a:schemeClr val="lt1"/>
+          </a:fontRef>
+        </p:style>
+        <p:txBody>
+          <a:bodyPr rtlCol="0" anchor="ctr"/>
+          <a:lstStyle/>
+          <a:p>
+            <a:pPr algn="ctr"/>
+            <a:r>
+              <a:rPr lang="en-US" dirty="0">
+                <a:solidFill>
+                  <a:schemeClr val="tx1"/>
+                </a:solidFill>
+              </a:rPr>
+              <a:t>Storage:</a:t>
+            </a:r>
+          </a:p>
+          <a:p>
+            <a:pPr algn="ctr"/>
+            <a:r>
+              <a:rPr lang="en-US" dirty="0">
+                <a:solidFill>
+                  <a:schemeClr val="tx1"/>
+                </a:solidFill>
+              </a:rPr>
+              <a:t>/home/&lt;username&gt;</a:t>
             </a:r>
           </a:p>
         </p:txBody>
